--- a/entstore_features_update.pptx
+++ b/entstore_features_update.pptx
@@ -2609,7 +2609,7 @@
                 <a:ea typeface="Yu Mincho" pitchFamily="34" charset="-122"/>
                 <a:cs typeface="Yu Mincho" pitchFamily="34" charset="-120"/>
               </a:rPr>
-              <a:t>グループ各社のことは、</a:t>
+              <a:t>紹介は聞いていても、</a:t>
             </a:r>
             <a:endParaRPr lang="en-US" sz="1600" dirty="0"/>
           </a:p>
@@ -2629,7 +2629,7 @@
                 <a:ea typeface="Yu Mincho" pitchFamily="34" charset="-122"/>
                 <a:cs typeface="Yu Mincho" pitchFamily="34" charset="-120"/>
               </a:rPr>
-              <a:t>朝礼で聞いただけ</a:t>
+              <a:t>実際には体験していない</a:t>
             </a:r>
             <a:endParaRPr lang="en-US" sz="1600" dirty="0"/>
           </a:p>
@@ -2646,7 +2646,7 @@
                 <a:ea typeface="Segoe UI" pitchFamily="34" charset="-122"/>
                 <a:cs typeface="Segoe UI" pitchFamily="34" charset="-120"/>
               </a:rPr>
-              <a:t>Mới nghe giới thiệu, chưa được trải nghiệm thực tế</a:t>
+              <a:t>Mặc dù đã được nghe giới thiệu, nhưng chưa được trải nghiệm thực tế</a:t>
             </a:r>
             <a:endParaRPr lang="en-US" sz="1600" dirty="0"/>
           </a:p>
@@ -2711,7 +2711,7 @@
                 <a:ea typeface="Yu Gothic" pitchFamily="34" charset="-122"/>
                 <a:cs typeface="Yu Gothic" pitchFamily="34" charset="-120"/>
               </a:rPr>
-              <a:t>グループ各社のことは、毎朝の朝礼の紹介スライドで聞いただけで、実際に体験したことはありませんでした。</a:t>
+              <a:t>グループ各社のことは、毎朝の朝礼の紹介スライドで聞いてはいましたが、実際に体験したことはありませんでした。</a:t>
             </a:r>
             <a:endParaRPr lang="en-US" sz="1050" dirty="0"/>
           </a:p>
@@ -2734,7 +2734,7 @@
                 <a:ea typeface="Segoe UI" pitchFamily="34" charset="-122"/>
                 <a:cs typeface="Segoe UI" pitchFamily="34" charset="-120"/>
               </a:rPr>
-              <a:t>Các mô hình công ty trong tập đoàn, em mới chỉ được nghe giới thiệu qua slide giới thiệu buổi sáng hằng ngày và chưa được trải nghiệm thực tế.</a:t>
+              <a:t>Các mô hình công ty trong tập đoàn, em đã được nghe giới thiệu qua slide giới thiệu buổi sáng hằng ngày nhưng lại chưa được trải nghiệm thực tế.</a:t>
             </a:r>
             <a:endParaRPr lang="en-US" sz="1050" dirty="0"/>
           </a:p>
@@ -3463,7 +3463,7 @@
                 <a:ea typeface="Yu Gothic" pitchFamily="34" charset="-122"/>
                 <a:cs typeface="Yu Gothic" pitchFamily="34" charset="-120"/>
               </a:rPr>
-              <a:t>調べを深め、ベトナムと日本の上司の方々にもご意見をいただいたうえで、会社とテーマを決めました。</a:t>
+              <a:t>調べたうえで、ベトナムと日本の上司の方々にもご意見をいただき、会社とテーマを決めました。</a:t>
             </a:r>
             <a:endParaRPr lang="en-US" sz="1050" dirty="0"/>
           </a:p>
@@ -3486,7 +3486,7 @@
                 <a:ea typeface="Segoe UI" pitchFamily="34" charset="-122"/>
                 <a:cs typeface="Segoe UI" pitchFamily="34" charset="-120"/>
               </a:rPr>
-              <a:t>Sau khi đào sâu tìm hiểu và tham khảo ý kiến của các sếp ở cả Việt Nam và Nhật Bản, em đã quyết định chọn công ty cũng như đề tài cho thử thách năm nay.</a:t>
+              <a:t>Sau khi tìm hiểu và tham khảo ý kiến của các sếp ở cả Việt Nam và Nhật Bản, em đã quyết định chọn công ty cũng như đề tài cho thử thách năm nay.</a:t>
             </a:r>
             <a:endParaRPr lang="en-US" sz="1050" dirty="0"/>
           </a:p>
@@ -5127,7 +5127,7 @@
                 <a:ea typeface="Yu Mincho" pitchFamily="34" charset="-122"/>
                 <a:cs typeface="Yu Mincho" pitchFamily="34" charset="-120"/>
               </a:rPr>
-              <a:t>待つサイトから、案内するサイトへ</a:t>
+              <a:t>紹介だけのサイトから、スムーズに使えるサイトへ</a:t>
             </a:r>
             <a:endParaRPr lang="en-US" sz="2700" dirty="0"/>
           </a:p>
@@ -5166,7 +5166,7 @@
                 <a:ea typeface="Segoe UI" pitchFamily="34" charset="-122"/>
                 <a:cs typeface="Segoe UI" pitchFamily="34" charset="-120"/>
               </a:rPr>
-              <a:t>Từ website chỉ nằm chờ sang website biết dẫn đường cho khách</a:t>
+              <a:t>Từ website giới thiệu đơn giản đến website giúp khách hàng có trải nghiệm mượt mà hơn</a:t>
             </a:r>
             <a:endParaRPr lang="en-US" sz="1250" dirty="0"/>
           </a:p>
@@ -7064,7 +7064,7 @@
         <p:spPr>
           <a:xfrm>
             <a:off x="566928" y="3035808"/>
-            <a:ext cx="6949440" cy="1097280"/>
+            <a:ext cx="6949440" cy="914400"/>
           </a:xfrm>
           <a:prstGeom prst="rect">
             <a:avLst/>
@@ -7089,7 +7089,7 @@
         <p:spPr>
           <a:xfrm>
             <a:off x="566928" y="3035808"/>
-            <a:ext cx="54864" cy="1097280"/>
+            <a:ext cx="54864" cy="914400"/>
           </a:xfrm>
           <a:prstGeom prst="rect">
             <a:avLst/>
@@ -7114,7 +7114,7 @@
         <p:spPr>
           <a:xfrm>
             <a:off x="804672" y="3035808"/>
-            <a:ext cx="6583680" cy="1097280"/>
+            <a:ext cx="6583680" cy="914400"/>
           </a:xfrm>
           <a:prstGeom prst="rect">
             <a:avLst/>
@@ -7189,31 +7189,139 @@
             </a:r>
             <a:endParaRPr lang="en-US" sz="1150" dirty="0"/>
           </a:p>
+        </p:txBody>
+      </p:sp>
+      <p:sp>
+        <p:nvSpPr>
+          <p:cNvPr id="13" name="Shape 11"/>
+          <p:cNvSpPr/>
+          <p:nvPr/>
+        </p:nvSpPr>
+        <p:spPr>
+          <a:xfrm>
+            <a:off x="603504" y="4133088"/>
+            <a:ext cx="713232" cy="292608"/>
+          </a:xfrm>
+          <a:prstGeom prst="roundRect">
+            <a:avLst>
+              <a:gd name="adj" fmla="val 15625"/>
+            </a:avLst>
+          </a:prstGeom>
+          <a:solidFill>
+            <a:srgbClr val="E53935"/>
+          </a:solidFill>
+          <a:ln w="12700">
+            <a:solidFill>
+              <a:srgbClr val="E53935"/>
+            </a:solidFill>
+            <a:prstDash val="solid"/>
+          </a:ln>
+        </p:spPr>
+      </p:sp>
+      <p:sp>
+        <p:nvSpPr>
+          <p:cNvPr id="14" name="Text 12"/>
+          <p:cNvSpPr/>
+          <p:nvPr/>
+        </p:nvSpPr>
+        <p:spPr>
+          <a:xfrm>
+            <a:off x="603504" y="4133088"/>
+            <a:ext cx="713232" cy="292608"/>
+          </a:xfrm>
+          <a:prstGeom prst="rect">
+            <a:avLst/>
+          </a:prstGeom>
+          <a:noFill/>
+          <a:ln/>
+        </p:spPr>
+        <p:txBody>
+          <a:bodyPr wrap="square" rtlCol="0" anchor="ctr"/>
+          <a:lstStyle/>
+          <a:p>
+            <a:pPr eaLnBrk="1" latinLnBrk="0" hangingPunct="1" algn="ctr" indent="0" marL="0">
+              <a:buNone/>
+            </a:pPr>
+            <a:r>
+              <a:rPr lang="en-US" sz="1100" b="1" spc="100" kern="0" dirty="0">
+                <a:solidFill>
+                  <a:srgbClr val="FFFFFF"/>
+                </a:solidFill>
+                <a:latin typeface="Segoe UI" pitchFamily="34" charset="0"/>
+                <a:ea typeface="Segoe UI" pitchFamily="34" charset="-122"/>
+                <a:cs typeface="Segoe UI" pitchFamily="34" charset="-120"/>
+              </a:rPr>
+              <a:t>DEMO</a:t>
+            </a:r>
+            <a:endParaRPr lang="en-US" sz="1100" dirty="0"/>
+          </a:p>
+        </p:txBody>
+      </p:sp>
+      <p:sp>
+        <p:nvSpPr>
+          <p:cNvPr id="15" name="Text 13"/>
+          <p:cNvSpPr/>
+          <p:nvPr/>
+        </p:nvSpPr>
+        <p:spPr>
+          <a:xfrm>
+            <a:off x="1444752" y="4059936"/>
+            <a:ext cx="6126480" cy="475488"/>
+          </a:xfrm>
+          <a:prstGeom prst="rect">
+            <a:avLst/>
+          </a:prstGeom>
+          <a:noFill/>
+          <a:ln/>
+        </p:spPr>
+        <p:txBody>
+          <a:bodyPr wrap="square" rtlCol="0" anchor="ctr"/>
+          <a:lstStyle/>
           <a:p>
             <a:pPr eaLnBrk="1" latinLnBrk="0" hangingPunct="1" indent="0" marL="0">
               <a:lnSpc>
-                <a:spcPct val="125000"/>
+                <a:spcPct val="115000"/>
               </a:lnSpc>
               <a:buNone/>
             </a:pPr>
             <a:r>
-              <a:rPr lang="ja-JP" altLang="en-US" sz="850" dirty="0">
-                <a:solidFill>
-                  <a:srgbClr val="877258"/>
+              <a:rPr lang="ja-JP" altLang="en-US" sz="1100" b="1" dirty="0">
+                <a:solidFill>
+                  <a:srgbClr val="2A1A0E"/>
                 </a:solidFill>
                 <a:latin typeface="Yu Gothic" pitchFamily="34" charset="0"/>
                 <a:ea typeface="Yu Gothic" pitchFamily="34" charset="-122"/>
                 <a:cs typeface="Yu Gothic" pitchFamily="34" charset="-120"/>
               </a:rPr>
-              <a:t>※ 価格・在庫・特売はデモ用のデータです ／ Giá, tồn kho, KM là dữ liệu demo</a:t>
-            </a:r>
-            <a:endParaRPr lang="en-US" sz="1150" dirty="0"/>
-          </a:p>
-        </p:txBody>
-      </p:sp>
-      <p:sp>
-        <p:nvSpPr>
-          <p:cNvPr id="13" name="Shape 11"/>
+              <a:t>このタグが付いた数値（価格・在庫・特売など）は、デモ用の仮データです</a:t>
+            </a:r>
+            <a:endParaRPr lang="en-US" sz="1100" dirty="0"/>
+          </a:p>
+          <a:p>
+            <a:pPr eaLnBrk="1" latinLnBrk="0" hangingPunct="1" indent="0" marL="0">
+              <a:lnSpc>
+                <a:spcPct val="115000"/>
+              </a:lnSpc>
+              <a:buNone/>
+            </a:pPr>
+            <a:r>
+              <a:rPr lang="en-US" sz="950" dirty="0">
+                <a:solidFill>
+                  <a:srgbClr val="877258"/>
+                </a:solidFill>
+                <a:latin typeface="Segoe UI" pitchFamily="34" charset="0"/>
+                <a:ea typeface="Segoe UI" pitchFamily="34" charset="-122"/>
+                <a:cs typeface="Segoe UI" pitchFamily="34" charset="-120"/>
+              </a:rPr>
+              <a:t>Các số liệu gắn tag DEMO (giá, tồn kho, khuyến mãi…) là dữ liệu ảo dùng cho demo</a:t>
+            </a:r>
+            <a:endParaRPr lang="en-US" sz="1100" dirty="0"/>
+          </a:p>
+        </p:txBody>
+      </p:sp>
+      <p:sp>
+        <p:nvSpPr>
+          <p:cNvPr id="16" name="Shape 14"/>
           <p:cNvSpPr/>
           <p:nvPr/>
         </p:nvSpPr>
@@ -7247,7 +7355,7 @@
       </p:sp>
       <p:pic>
         <p:nvPicPr>
-          <p:cNvPr id="14" name="Image 0" descr="C:\Users\minhh\AppData\Local\Temp\claude\c--Users-minhh-Documents-challenge\0b7be4ed-3567-4081-a022-ada0920f3982\scratchpad\qr-demo.png">    </p:cNvPr>
+          <p:cNvPr id="17" name="Image 0" descr="C:\Users\minhh\AppData\Local\Temp\claude\c--Users-minhh-Documents-challenge\0b7be4ed-3567-4081-a022-ada0920f3982\scratchpad\qr-demo.png">    </p:cNvPr>
           <p:cNvPicPr>
             <a:picLocks noChangeAspect="1"/>
           </p:cNvPicPr>
@@ -7271,7 +7379,7 @@
       </p:pic>
       <p:sp>
         <p:nvSpPr>
-          <p:cNvPr id="15" name="Text 12"/>
+          <p:cNvPr id="18" name="Text 15"/>
           <p:cNvSpPr/>
           <p:nvPr/>
         </p:nvSpPr>
@@ -7327,7 +7435,7 @@
       </p:sp>
       <p:sp>
         <p:nvSpPr>
-          <p:cNvPr id="16" name="Shape 13"/>
+          <p:cNvPr id="19" name="Shape 16"/>
           <p:cNvSpPr/>
           <p:nvPr/>
         </p:nvSpPr>
@@ -7354,7 +7462,7 @@
       </p:sp>
       <p:sp>
         <p:nvSpPr>
-          <p:cNvPr id="17" name="Text 14"/>
+          <p:cNvPr id="20" name="Text 17"/>
           <p:cNvSpPr/>
           <p:nvPr/>
         </p:nvSpPr>
@@ -7410,7 +7518,7 @@
       </p:sp>
       <p:sp>
         <p:nvSpPr>
-          <p:cNvPr id="18" name="Text 15"/>
+          <p:cNvPr id="21" name="Text 18"/>
           <p:cNvSpPr/>
           <p:nvPr/>
         </p:nvSpPr>
@@ -7449,7 +7557,7 @@
       </p:sp>
       <p:sp>
         <p:nvSpPr>
-          <p:cNvPr id="19" name="Shape 16"/>
+          <p:cNvPr id="22" name="Shape 19"/>
           <p:cNvSpPr/>
           <p:nvPr/>
         </p:nvSpPr>
@@ -7476,7 +7584,7 @@
       </p:sp>
       <p:sp>
         <p:nvSpPr>
-          <p:cNvPr id="20" name="Text 17"/>
+          <p:cNvPr id="23" name="Text 20"/>
           <p:cNvSpPr/>
           <p:nvPr/>
         </p:nvSpPr>
@@ -7532,7 +7640,7 @@
       </p:sp>
       <p:sp>
         <p:nvSpPr>
-          <p:cNvPr id="21" name="Text 18"/>
+          <p:cNvPr id="24" name="Text 21"/>
           <p:cNvSpPr/>
           <p:nvPr/>
         </p:nvSpPr>
@@ -7571,7 +7679,7 @@
       </p:sp>
       <p:sp>
         <p:nvSpPr>
-          <p:cNvPr id="22" name="Shape 19"/>
+          <p:cNvPr id="25" name="Shape 22"/>
           <p:cNvSpPr/>
           <p:nvPr/>
         </p:nvSpPr>
@@ -7598,7 +7706,7 @@
       </p:sp>
       <p:sp>
         <p:nvSpPr>
-          <p:cNvPr id="23" name="Text 20"/>
+          <p:cNvPr id="26" name="Text 23"/>
           <p:cNvSpPr/>
           <p:nvPr/>
         </p:nvSpPr>
@@ -7654,7 +7762,7 @@
       </p:sp>
       <p:sp>
         <p:nvSpPr>
-          <p:cNvPr id="24" name="Text 21"/>
+          <p:cNvPr id="27" name="Text 24"/>
           <p:cNvSpPr/>
           <p:nvPr/>
         </p:nvSpPr>
@@ -7693,7 +7801,7 @@
       </p:sp>
       <p:sp>
         <p:nvSpPr>
-          <p:cNvPr id="25" name="Shape 22"/>
+          <p:cNvPr id="28" name="Shape 25"/>
           <p:cNvSpPr/>
           <p:nvPr/>
         </p:nvSpPr>
@@ -7720,7 +7828,7 @@
       </p:sp>
       <p:sp>
         <p:nvSpPr>
-          <p:cNvPr id="26" name="Text 23"/>
+          <p:cNvPr id="29" name="Text 26"/>
           <p:cNvSpPr/>
           <p:nvPr/>
         </p:nvSpPr>
@@ -7776,7 +7884,7 @@
       </p:sp>
       <p:sp>
         <p:nvSpPr>
-          <p:cNvPr id="27" name="Text 24"/>
+          <p:cNvPr id="30" name="Text 27"/>
           <p:cNvSpPr/>
           <p:nvPr/>
         </p:nvSpPr>
@@ -7815,7 +7923,7 @@
       </p:sp>
       <p:sp>
         <p:nvSpPr>
-          <p:cNvPr id="28" name="Shape 25"/>
+          <p:cNvPr id="31" name="Shape 28"/>
           <p:cNvSpPr/>
           <p:nvPr/>
         </p:nvSpPr>
@@ -7842,7 +7950,7 @@
       </p:sp>
       <p:sp>
         <p:nvSpPr>
-          <p:cNvPr id="29" name="Text 26"/>
+          <p:cNvPr id="32" name="Text 29"/>
           <p:cNvSpPr/>
           <p:nvPr/>
         </p:nvSpPr>
@@ -8341,7 +8449,7 @@
                 <a:ea typeface="Segoe UI" pitchFamily="34" charset="-122"/>
                 <a:cs typeface="Segoe UI" pitchFamily="34" charset="-120"/>
               </a:rPr>
-              <a:t>Khách (kể cả người nước ngoài) dễ dàng tìm kiếm được thông tin cần</a:t>
+              <a:t>Khách hàng (kể cả người nước ngoài) dễ dàng tìm kiếm được thông tin cần</a:t>
             </a:r>
             <a:endParaRPr lang="en-US" sz="1150" dirty="0"/>
           </a:p>
